--- a/base/apresentacao_relatorio.pptx
+++ b/base/apresentacao_relatorio.pptx
@@ -14,8 +14,8 @@
     <p:sldId id="261" r:id="rId8"/>
     <p:sldId id="262" r:id="rId9"/>
     <p:sldId id="263" r:id="rId10"/>
-    <p:sldId id="264" r:id="rId11"/>
-    <p:sldId id="265" r:id="rId12"/>
+    <p:sldId id="265" r:id="rId11"/>
+    <p:sldId id="264" r:id="rId12"/>
     <p:sldId id="270" r:id="rId13"/>
     <p:sldId id="267" r:id="rId14"/>
     <p:sldId id="269" r:id="rId15"/>
@@ -2815,6 +2815,54 @@
               <a:t>‹nº›</a:t>
             </a:fld>
             <a:endParaRPr lang="en-US"/>
+          </a:p>
+        </p:txBody>
+      </p:sp>
+      <p:sp>
+        <p:nvSpPr>
+          <p:cNvPr id="8" name="CaixaDeTexto 7">
+            <a:extLst>
+              <a:ext uri="{FF2B5EF4-FFF2-40B4-BE49-F238E27FC236}">
+                <a16:creationId xmlns:a16="http://schemas.microsoft.com/office/drawing/2014/main" id="{14985089-BDC0-E97B-2B24-E2D4081C4F15}"/>
+              </a:ext>
+            </a:extLst>
+          </p:cNvPr>
+          <p:cNvSpPr txBox="1"/>
+          <p:nvPr userDrawn="1">
+            <p:extLst>
+              <p:ext uri="{1162E1C5-73C7-4A58-AE30-91384D911F3F}">
+                <p184:classification xmlns:p184="http://schemas.microsoft.com/office/powerpoint/2018/4/main" val="ftr"/>
+              </p:ext>
+            </p:extLst>
+          </p:nvPr>
+        </p:nvSpPr>
+        <p:spPr>
+          <a:xfrm>
+            <a:off x="5695950" y="6611620"/>
+            <a:ext cx="831850" cy="182880"/>
+          </a:xfrm>
+          <a:prstGeom prst="rect">
+            <a:avLst/>
+          </a:prstGeom>
+        </p:spPr>
+        <p:txBody>
+          <a:bodyPr horzOverflow="overflow" lIns="0" tIns="0" rIns="0" bIns="0">
+            <a:spAutoFit/>
+          </a:bodyPr>
+          <a:lstStyle/>
+          <a:p>
+            <a:pPr algn="l"/>
+            <a:r>
+              <a:rPr lang="pt-BR" sz="1200">
+                <a:solidFill>
+                  <a:srgbClr val="0000FF">
+                    <a:alpha val="50000"/>
+                  </a:srgbClr>
+                </a:solidFill>
+                <a:latin typeface="Aptos" panose="020B0004020202020204" pitchFamily="34" charset="0"/>
+              </a:rPr>
+              <a:t>Internal Use</a:t>
+            </a:r>
           </a:p>
         </p:txBody>
       </p:sp>
@@ -3767,716 +3815,6 @@
 </file>
 
 <file path=ppt/slides/slide10.xml><?xml version="1.0" encoding="utf-8"?>
-<p:sld xmlns:a="http://schemas.openxmlformats.org/drawingml/2006/main" xmlns:r="http://schemas.openxmlformats.org/officeDocument/2006/relationships" xmlns:p="http://schemas.openxmlformats.org/presentationml/2006/main">
-  <p:cSld>
-    <p:bg>
-      <p:bgPr>
-        <a:solidFill>
-          <a:srgbClr val="FFFFFF"/>
-        </a:solidFill>
-        <a:effectLst/>
-      </p:bgPr>
-    </p:bg>
-    <p:spTree>
-      <p:nvGrpSpPr>
-        <p:cNvPr id="1" name=""/>
-        <p:cNvGrpSpPr/>
-        <p:nvPr/>
-      </p:nvGrpSpPr>
-      <p:grpSpPr>
-        <a:xfrm>
-          <a:off x="0" y="0"/>
-          <a:ext cx="0" cy="0"/>
-          <a:chOff x="0" y="0"/>
-          <a:chExt cx="0" cy="0"/>
-        </a:xfrm>
-      </p:grpSpPr>
-      <p:sp>
-        <p:nvSpPr>
-          <p:cNvPr id="2" name="Rounded Rectangle 1"/>
-          <p:cNvSpPr/>
-          <p:nvPr/>
-        </p:nvSpPr>
-        <p:spPr>
-          <a:xfrm>
-            <a:off x="609600" y="1819275"/>
-            <a:ext cx="3505200" cy="1190625"/>
-          </a:xfrm>
-          <a:prstGeom prst="roundRect">
-            <a:avLst>
-              <a:gd name="adj" fmla="val 9600"/>
-            </a:avLst>
-          </a:prstGeom>
-          <a:solidFill>
-            <a:srgbClr val="F8FAFC"/>
-          </a:solidFill>
-          <a:ln>
-            <a:noFill/>
-          </a:ln>
-          <a:effectLst/>
-        </p:spPr>
-        <p:style>
-          <a:lnRef idx="1">
-            <a:schemeClr val="accent1"/>
-          </a:lnRef>
-          <a:fillRef idx="3">
-            <a:schemeClr val="accent1"/>
-          </a:fillRef>
-          <a:effectRef idx="2">
-            <a:schemeClr val="accent1"/>
-          </a:effectRef>
-          <a:fontRef idx="minor">
-            <a:schemeClr val="lt1"/>
-          </a:fontRef>
-        </p:style>
-        <p:txBody>
-          <a:bodyPr rtlCol="0" anchor="ctr"/>
-          <a:lstStyle/>
-          <a:p>
-            <a:pPr algn="ctr"/>
-            <a:endParaRPr/>
-          </a:p>
-        </p:txBody>
-      </p:sp>
-      <p:sp>
-        <p:nvSpPr>
-          <p:cNvPr id="3" name="Rounded Rectangle 2"/>
-          <p:cNvSpPr/>
-          <p:nvPr/>
-        </p:nvSpPr>
-        <p:spPr>
-          <a:xfrm>
-            <a:off x="4343400" y="1819275"/>
-            <a:ext cx="3505200" cy="1190625"/>
-          </a:xfrm>
-          <a:prstGeom prst="roundRect">
-            <a:avLst>
-              <a:gd name="adj" fmla="val 9600"/>
-            </a:avLst>
-          </a:prstGeom>
-          <a:solidFill>
-            <a:srgbClr val="F0F9FF"/>
-          </a:solidFill>
-          <a:ln>
-            <a:noFill/>
-          </a:ln>
-          <a:effectLst/>
-        </p:spPr>
-        <p:style>
-          <a:lnRef idx="1">
-            <a:schemeClr val="accent1"/>
-          </a:lnRef>
-          <a:fillRef idx="3">
-            <a:schemeClr val="accent1"/>
-          </a:fillRef>
-          <a:effectRef idx="2">
-            <a:schemeClr val="accent1"/>
-          </a:effectRef>
-          <a:fontRef idx="minor">
-            <a:schemeClr val="lt1"/>
-          </a:fontRef>
-        </p:style>
-        <p:txBody>
-          <a:bodyPr rtlCol="0" anchor="ctr"/>
-          <a:lstStyle/>
-          <a:p>
-            <a:pPr algn="ctr"/>
-            <a:endParaRPr/>
-          </a:p>
-        </p:txBody>
-      </p:sp>
-      <p:sp>
-        <p:nvSpPr>
-          <p:cNvPr id="4" name="Rounded Rectangle 3"/>
-          <p:cNvSpPr/>
-          <p:nvPr/>
-        </p:nvSpPr>
-        <p:spPr>
-          <a:xfrm>
-            <a:off x="8077200" y="1819275"/>
-            <a:ext cx="3505200" cy="1190625"/>
-          </a:xfrm>
-          <a:prstGeom prst="roundRect">
-            <a:avLst>
-              <a:gd name="adj" fmla="val 9600"/>
-            </a:avLst>
-          </a:prstGeom>
-          <a:solidFill>
-            <a:srgbClr val="F0F9FF"/>
-          </a:solidFill>
-          <a:ln>
-            <a:noFill/>
-          </a:ln>
-          <a:effectLst/>
-        </p:spPr>
-        <p:style>
-          <a:lnRef idx="1">
-            <a:schemeClr val="accent1"/>
-          </a:lnRef>
-          <a:fillRef idx="3">
-            <a:schemeClr val="accent1"/>
-          </a:fillRef>
-          <a:effectRef idx="2">
-            <a:schemeClr val="accent1"/>
-          </a:effectRef>
-          <a:fontRef idx="minor">
-            <a:schemeClr val="lt1"/>
-          </a:fontRef>
-        </p:style>
-        <p:txBody>
-          <a:bodyPr rtlCol="0" anchor="ctr"/>
-          <a:lstStyle/>
-          <a:p>
-            <a:pPr algn="ctr"/>
-            <a:endParaRPr/>
-          </a:p>
-        </p:txBody>
-      </p:sp>
-      <p:sp>
-        <p:nvSpPr>
-          <p:cNvPr id="5" name="Rounded Rectangle 4"/>
-          <p:cNvSpPr/>
-          <p:nvPr/>
-        </p:nvSpPr>
-        <p:spPr>
-          <a:xfrm>
-            <a:off x="609600" y="3314700"/>
-            <a:ext cx="10972800" cy="2933700"/>
-          </a:xfrm>
-          <a:prstGeom prst="roundRect">
-            <a:avLst>
-              <a:gd name="adj" fmla="val 5194"/>
-            </a:avLst>
-          </a:prstGeom>
-          <a:solidFill>
-            <a:srgbClr val="F1F5F9"/>
-          </a:solidFill>
-          <a:ln w="28575">
-            <a:solidFill>
-              <a:srgbClr val="CBD5E1"/>
-            </a:solidFill>
-          </a:ln>
-          <a:effectLst/>
-        </p:spPr>
-        <p:style>
-          <a:lnRef idx="1">
-            <a:schemeClr val="accent1"/>
-          </a:lnRef>
-          <a:fillRef idx="3">
-            <a:schemeClr val="accent1"/>
-          </a:fillRef>
-          <a:effectRef idx="2">
-            <a:schemeClr val="accent1"/>
-          </a:effectRef>
-          <a:fontRef idx="minor">
-            <a:schemeClr val="lt1"/>
-          </a:fontRef>
-        </p:style>
-        <p:txBody>
-          <a:bodyPr rtlCol="0" anchor="ctr"/>
-          <a:lstStyle/>
-          <a:p>
-            <a:pPr algn="ctr"/>
-            <a:endParaRPr/>
-          </a:p>
-        </p:txBody>
-      </p:sp>
-      <p:sp>
-        <p:nvSpPr>
-          <p:cNvPr id="6" name="Rectangle 5"/>
-          <p:cNvSpPr/>
-          <p:nvPr/>
-        </p:nvSpPr>
-        <p:spPr>
-          <a:xfrm>
-            <a:off x="609600" y="1819275"/>
-            <a:ext cx="57150" cy="1190625"/>
-          </a:xfrm>
-          <a:prstGeom prst="rect">
-            <a:avLst/>
-          </a:prstGeom>
-          <a:solidFill>
-            <a:srgbClr val="E2E8F0"/>
-          </a:solidFill>
-          <a:ln>
-            <a:noFill/>
-          </a:ln>
-          <a:effectLst/>
-        </p:spPr>
-        <p:style>
-          <a:lnRef idx="1">
-            <a:schemeClr val="accent1"/>
-          </a:lnRef>
-          <a:fillRef idx="3">
-            <a:schemeClr val="accent1"/>
-          </a:fillRef>
-          <a:effectRef idx="2">
-            <a:schemeClr val="accent1"/>
-          </a:effectRef>
-          <a:fontRef idx="minor">
-            <a:schemeClr val="lt1"/>
-          </a:fontRef>
-        </p:style>
-        <p:txBody>
-          <a:bodyPr rtlCol="0" anchor="ctr"/>
-          <a:lstStyle/>
-          <a:p>
-            <a:pPr algn="ctr"/>
-            <a:endParaRPr/>
-          </a:p>
-        </p:txBody>
-      </p:sp>
-      <p:sp>
-        <p:nvSpPr>
-          <p:cNvPr id="7" name="Rectangle 6"/>
-          <p:cNvSpPr/>
-          <p:nvPr/>
-        </p:nvSpPr>
-        <p:spPr>
-          <a:xfrm>
-            <a:off x="4343400" y="1819275"/>
-            <a:ext cx="57150" cy="1190625"/>
-          </a:xfrm>
-          <a:prstGeom prst="rect">
-            <a:avLst/>
-          </a:prstGeom>
-          <a:solidFill>
-            <a:srgbClr val="0284C7"/>
-          </a:solidFill>
-          <a:ln>
-            <a:noFill/>
-          </a:ln>
-          <a:effectLst/>
-        </p:spPr>
-        <p:style>
-          <a:lnRef idx="1">
-            <a:schemeClr val="accent1"/>
-          </a:lnRef>
-          <a:fillRef idx="3">
-            <a:schemeClr val="accent1"/>
-          </a:fillRef>
-          <a:effectRef idx="2">
-            <a:schemeClr val="accent1"/>
-          </a:effectRef>
-          <a:fontRef idx="minor">
-            <a:schemeClr val="lt1"/>
-          </a:fontRef>
-        </p:style>
-        <p:txBody>
-          <a:bodyPr rtlCol="0" anchor="ctr"/>
-          <a:lstStyle/>
-          <a:p>
-            <a:pPr algn="ctr"/>
-            <a:endParaRPr/>
-          </a:p>
-        </p:txBody>
-      </p:sp>
-      <p:sp>
-        <p:nvSpPr>
-          <p:cNvPr id="8" name="Rectangle 7"/>
-          <p:cNvSpPr/>
-          <p:nvPr/>
-        </p:nvSpPr>
-        <p:spPr>
-          <a:xfrm>
-            <a:off x="8077200" y="1819275"/>
-            <a:ext cx="57150" cy="1190625"/>
-          </a:xfrm>
-          <a:prstGeom prst="rect">
-            <a:avLst/>
-          </a:prstGeom>
-          <a:solidFill>
-            <a:srgbClr val="0EA5E9"/>
-          </a:solidFill>
-          <a:ln>
-            <a:noFill/>
-          </a:ln>
-          <a:effectLst/>
-        </p:spPr>
-        <p:style>
-          <a:lnRef idx="1">
-            <a:schemeClr val="accent1"/>
-          </a:lnRef>
-          <a:fillRef idx="3">
-            <a:schemeClr val="accent1"/>
-          </a:fillRef>
-          <a:effectRef idx="2">
-            <a:schemeClr val="accent1"/>
-          </a:effectRef>
-          <a:fontRef idx="minor">
-            <a:schemeClr val="lt1"/>
-          </a:fontRef>
-        </p:style>
-        <p:txBody>
-          <a:bodyPr rtlCol="0" anchor="ctr"/>
-          <a:lstStyle/>
-          <a:p>
-            <a:pPr algn="ctr"/>
-            <a:endParaRPr/>
-          </a:p>
-        </p:txBody>
-      </p:sp>
-      <p:sp>
-        <p:nvSpPr>
-          <p:cNvPr id="9" name="TextBox 8"/>
-          <p:cNvSpPr txBox="1"/>
-          <p:nvPr/>
-        </p:nvSpPr>
-        <p:spPr>
-          <a:xfrm>
-            <a:off x="609600" y="609600"/>
-            <a:ext cx="11582400" cy="466725"/>
-          </a:xfrm>
-          <a:prstGeom prst="rect">
-            <a:avLst/>
-          </a:prstGeom>
-          <a:noFill/>
-        </p:spPr>
-        <p:txBody>
-          <a:bodyPr wrap="none" lIns="0" tIns="0" rIns="0" bIns="0" anchor="t">
-            <a:spAutoFit/>
-          </a:bodyPr>
-          <a:lstStyle/>
-          <a:p>
-            <a:pPr algn="l"/>
-            <a:r>
-              <a:rPr sz="3000" b="1" i="0" u="none">
-                <a:solidFill>
-                  <a:srgbClr val="0F172A"/>
-                </a:solidFill>
-                <a:latin typeface="Inter"/>
-              </a:rPr>
-              <a:t>Space Invaders: aprendizado visual</a:t>
-            </a:r>
-          </a:p>
-        </p:txBody>
-      </p:sp>
-      <p:sp>
-        <p:nvSpPr>
-          <p:cNvPr id="10" name="TextBox 9"/>
-          <p:cNvSpPr txBox="1"/>
-          <p:nvPr/>
-        </p:nvSpPr>
-        <p:spPr>
-          <a:xfrm>
-            <a:off x="609600" y="1190625"/>
-            <a:ext cx="11582400" cy="247650"/>
-          </a:xfrm>
-          <a:prstGeom prst="rect">
-            <a:avLst/>
-          </a:prstGeom>
-          <a:noFill/>
-        </p:spPr>
-        <p:txBody>
-          <a:bodyPr wrap="none" lIns="0" tIns="0" rIns="0" bIns="0" anchor="t">
-            <a:spAutoFit/>
-          </a:bodyPr>
-          <a:lstStyle/>
-          <a:p>
-            <a:pPr algn="l"/>
-            <a:r>
-              <a:rPr sz="1650" b="0" i="0" u="none">
-                <a:solidFill>
-                  <a:srgbClr val="64748B"/>
-                </a:solidFill>
-                <a:latin typeface="Inter"/>
-              </a:rPr>
-              <a:t>Ambos os agentes superaram a referência aleatória, sem avanço monotônico.</a:t>
-            </a:r>
-          </a:p>
-        </p:txBody>
-      </p:sp>
-      <p:sp>
-        <p:nvSpPr>
-          <p:cNvPr id="11" name="TextBox 10"/>
-          <p:cNvSpPr txBox="1"/>
-          <p:nvPr/>
-        </p:nvSpPr>
-        <p:spPr>
-          <a:xfrm>
-            <a:off x="895350" y="2047875"/>
-            <a:ext cx="3738562" cy="457200"/>
-          </a:xfrm>
-          <a:prstGeom prst="rect">
-            <a:avLst/>
-          </a:prstGeom>
-          <a:noFill/>
-        </p:spPr>
-        <p:txBody>
-          <a:bodyPr wrap="none" lIns="0" tIns="0" rIns="0" bIns="0" anchor="t">
-            <a:spAutoFit/>
-          </a:bodyPr>
-          <a:lstStyle/>
-          <a:p>
-            <a:pPr algn="l">
-              <a:lnSpc>
-                <a:spcPts val="3600"/>
-              </a:lnSpc>
-            </a:pPr>
-            <a:r>
-              <a:rPr sz="3600" b="1" i="0" u="none">
-                <a:solidFill>
-                  <a:srgbClr val="64748B"/>
-                </a:solidFill>
-                <a:latin typeface="Inter"/>
-              </a:rPr>
-              <a:t>151,50</a:t>
-            </a:r>
-          </a:p>
-        </p:txBody>
-      </p:sp>
-      <p:sp>
-        <p:nvSpPr>
-          <p:cNvPr id="12" name="TextBox 11"/>
-          <p:cNvSpPr txBox="1"/>
-          <p:nvPr/>
-        </p:nvSpPr>
-        <p:spPr>
-          <a:xfrm>
-            <a:off x="895350" y="2581275"/>
-            <a:ext cx="3738562" cy="200025"/>
-          </a:xfrm>
-          <a:prstGeom prst="rect">
-            <a:avLst/>
-          </a:prstGeom>
-          <a:noFill/>
-        </p:spPr>
-        <p:txBody>
-          <a:bodyPr wrap="none" lIns="0" tIns="0" rIns="0" bIns="0" anchor="t">
-            <a:spAutoFit/>
-          </a:bodyPr>
-          <a:lstStyle/>
-          <a:p>
-            <a:pPr algn="l"/>
-            <a:r>
-              <a:rPr sz="1350" b="1" i="0" u="none">
-                <a:solidFill>
-                  <a:srgbClr val="64748B"/>
-                </a:solidFill>
-                <a:latin typeface="Inter"/>
-              </a:rPr>
-              <a:t>AGENTE ALEATÓRIO</a:t>
-            </a:r>
-          </a:p>
-        </p:txBody>
-      </p:sp>
-      <p:sp>
-        <p:nvSpPr>
-          <p:cNvPr id="13" name="TextBox 12"/>
-          <p:cNvSpPr txBox="1"/>
-          <p:nvPr/>
-        </p:nvSpPr>
-        <p:spPr>
-          <a:xfrm>
-            <a:off x="4629150" y="2047875"/>
-            <a:ext cx="3738562" cy="457200"/>
-          </a:xfrm>
-          <a:prstGeom prst="rect">
-            <a:avLst/>
-          </a:prstGeom>
-          <a:noFill/>
-        </p:spPr>
-        <p:txBody>
-          <a:bodyPr wrap="none" lIns="0" tIns="0" rIns="0" bIns="0" anchor="t">
-            <a:spAutoFit/>
-          </a:bodyPr>
-          <a:lstStyle/>
-          <a:p>
-            <a:pPr algn="l">
-              <a:lnSpc>
-                <a:spcPts val="3600"/>
-              </a:lnSpc>
-            </a:pPr>
-            <a:r>
-              <a:rPr sz="3600" b="1" i="0" u="none">
-                <a:solidFill>
-                  <a:srgbClr val="0F172A"/>
-                </a:solidFill>
-                <a:latin typeface="Inter"/>
-              </a:rPr>
-              <a:t>381,67</a:t>
-            </a:r>
-          </a:p>
-        </p:txBody>
-      </p:sp>
-      <p:sp>
-        <p:nvSpPr>
-          <p:cNvPr id="14" name="TextBox 13"/>
-          <p:cNvSpPr txBox="1"/>
-          <p:nvPr/>
-        </p:nvSpPr>
-        <p:spPr>
-          <a:xfrm>
-            <a:off x="4629150" y="2581275"/>
-            <a:ext cx="3738562" cy="200025"/>
-          </a:xfrm>
-          <a:prstGeom prst="rect">
-            <a:avLst/>
-          </a:prstGeom>
-          <a:noFill/>
-        </p:spPr>
-        <p:txBody>
-          <a:bodyPr wrap="none" lIns="0" tIns="0" rIns="0" bIns="0" anchor="t">
-            <a:spAutoFit/>
-          </a:bodyPr>
-          <a:lstStyle/>
-          <a:p>
-            <a:pPr algn="l"/>
-            <a:r>
-              <a:rPr sz="1350" b="1" i="0" u="none">
-                <a:solidFill>
-                  <a:srgbClr val="64748B"/>
-                </a:solidFill>
-                <a:latin typeface="Inter"/>
-              </a:rPr>
-              <a:t>MÉDIA DQN</a:t>
-            </a:r>
-          </a:p>
-        </p:txBody>
-      </p:sp>
-      <p:sp>
-        <p:nvSpPr>
-          <p:cNvPr id="15" name="TextBox 14"/>
-          <p:cNvSpPr txBox="1"/>
-          <p:nvPr/>
-        </p:nvSpPr>
-        <p:spPr>
-          <a:xfrm>
-            <a:off x="8362950" y="2047875"/>
-            <a:ext cx="3738562" cy="457200"/>
-          </a:xfrm>
-          <a:prstGeom prst="rect">
-            <a:avLst/>
-          </a:prstGeom>
-          <a:noFill/>
-        </p:spPr>
-        <p:txBody>
-          <a:bodyPr wrap="none" lIns="0" tIns="0" rIns="0" bIns="0" anchor="t">
-            <a:spAutoFit/>
-          </a:bodyPr>
-          <a:lstStyle/>
-          <a:p>
-            <a:pPr algn="l">
-              <a:lnSpc>
-                <a:spcPts val="3600"/>
-              </a:lnSpc>
-            </a:pPr>
-            <a:r>
-              <a:rPr sz="3600" b="1" i="0" u="none">
-                <a:solidFill>
-                  <a:srgbClr val="0F172A"/>
-                </a:solidFill>
-                <a:latin typeface="Inter"/>
-              </a:rPr>
-              <a:t>444,17</a:t>
-            </a:r>
-          </a:p>
-        </p:txBody>
-      </p:sp>
-      <p:sp>
-        <p:nvSpPr>
-          <p:cNvPr id="16" name="TextBox 15"/>
-          <p:cNvSpPr txBox="1"/>
-          <p:nvPr/>
-        </p:nvSpPr>
-        <p:spPr>
-          <a:xfrm>
-            <a:off x="8362950" y="2581275"/>
-            <a:ext cx="3738562" cy="200025"/>
-          </a:xfrm>
-          <a:prstGeom prst="rect">
-            <a:avLst/>
-          </a:prstGeom>
-          <a:noFill/>
-        </p:spPr>
-        <p:txBody>
-          <a:bodyPr wrap="none" lIns="0" tIns="0" rIns="0" bIns="0" anchor="t">
-            <a:spAutoFit/>
-          </a:bodyPr>
-          <a:lstStyle/>
-          <a:p>
-            <a:pPr algn="l"/>
-            <a:r>
-              <a:rPr sz="1350" b="1" i="0" u="none">
-                <a:solidFill>
-                  <a:srgbClr val="64748B"/>
-                </a:solidFill>
-                <a:latin typeface="Inter"/>
-              </a:rPr>
-              <a:t>MÉDIA DDQN</a:t>
-            </a:r>
-          </a:p>
-        </p:txBody>
-      </p:sp>
-      <p:pic>
-        <p:nvPicPr>
-          <p:cNvPr id="20" name="Imagem 19">
-            <a:extLst>
-              <a:ext uri="{FF2B5EF4-FFF2-40B4-BE49-F238E27FC236}">
-                <a16:creationId xmlns:a16="http://schemas.microsoft.com/office/drawing/2014/main" id="{1FD3FB26-EA3C-4F3F-AD69-B4874F544246}"/>
-              </a:ext>
-            </a:extLst>
-          </p:cNvPr>
-          <p:cNvPicPr>
-            <a:picLocks noChangeAspect="1"/>
-          </p:cNvPicPr>
-          <p:nvPr/>
-        </p:nvPicPr>
-        <p:blipFill>
-          <a:blip r:embed="rId2"/>
-          <a:stretch>
-            <a:fillRect/>
-          </a:stretch>
-        </p:blipFill>
-        <p:spPr>
-          <a:xfrm>
-            <a:off x="6254781" y="3543300"/>
-            <a:ext cx="5152635" cy="2339265"/>
-          </a:xfrm>
-          <a:prstGeom prst="rect">
-            <a:avLst/>
-          </a:prstGeom>
-        </p:spPr>
-      </p:pic>
-      <p:pic>
-        <p:nvPicPr>
-          <p:cNvPr id="22" name="Imagem 21">
-            <a:extLst>
-              <a:ext uri="{FF2B5EF4-FFF2-40B4-BE49-F238E27FC236}">
-                <a16:creationId xmlns:a16="http://schemas.microsoft.com/office/drawing/2014/main" id="{E37304FF-C1B9-F637-7DD9-5489443D1A68}"/>
-              </a:ext>
-            </a:extLst>
-          </p:cNvPr>
-          <p:cNvPicPr>
-            <a:picLocks noChangeAspect="1"/>
-          </p:cNvPicPr>
-          <p:nvPr/>
-        </p:nvPicPr>
-        <p:blipFill>
-          <a:blip r:embed="rId3"/>
-          <a:stretch>
-            <a:fillRect/>
-          </a:stretch>
-        </p:blipFill>
-        <p:spPr>
-          <a:xfrm>
-            <a:off x="935264" y="3543301"/>
-            <a:ext cx="5152635" cy="2339265"/>
-          </a:xfrm>
-          <a:prstGeom prst="rect">
-            <a:avLst/>
-          </a:prstGeom>
-        </p:spPr>
-      </p:pic>
-    </p:spTree>
-  </p:cSld>
-  <p:clrMapOvr>
-    <a:masterClrMapping/>
-  </p:clrMapOvr>
-</p:sld>
-</file>
-
-<file path=ppt/slides/slide11.xml><?xml version="1.0" encoding="utf-8"?>
 <p:sld xmlns:a="http://schemas.openxmlformats.org/drawingml/2006/main" xmlns:r="http://schemas.openxmlformats.org/officeDocument/2006/relationships" xmlns:p="http://schemas.openxmlformats.org/presentationml/2006/main">
   <p:cSld>
     <p:spTree>
@@ -6164,6 +5502,716 @@
 </p:sld>
 </file>
 
+<file path=ppt/slides/slide11.xml><?xml version="1.0" encoding="utf-8"?>
+<p:sld xmlns:a="http://schemas.openxmlformats.org/drawingml/2006/main" xmlns:r="http://schemas.openxmlformats.org/officeDocument/2006/relationships" xmlns:p="http://schemas.openxmlformats.org/presentationml/2006/main">
+  <p:cSld>
+    <p:bg>
+      <p:bgPr>
+        <a:solidFill>
+          <a:srgbClr val="FFFFFF"/>
+        </a:solidFill>
+        <a:effectLst/>
+      </p:bgPr>
+    </p:bg>
+    <p:spTree>
+      <p:nvGrpSpPr>
+        <p:cNvPr id="1" name=""/>
+        <p:cNvGrpSpPr/>
+        <p:nvPr/>
+      </p:nvGrpSpPr>
+      <p:grpSpPr>
+        <a:xfrm>
+          <a:off x="0" y="0"/>
+          <a:ext cx="0" cy="0"/>
+          <a:chOff x="0" y="0"/>
+          <a:chExt cx="0" cy="0"/>
+        </a:xfrm>
+      </p:grpSpPr>
+      <p:sp>
+        <p:nvSpPr>
+          <p:cNvPr id="2" name="Rounded Rectangle 1"/>
+          <p:cNvSpPr/>
+          <p:nvPr/>
+        </p:nvSpPr>
+        <p:spPr>
+          <a:xfrm>
+            <a:off x="609600" y="1819275"/>
+            <a:ext cx="3505200" cy="1190625"/>
+          </a:xfrm>
+          <a:prstGeom prst="roundRect">
+            <a:avLst>
+              <a:gd name="adj" fmla="val 9600"/>
+            </a:avLst>
+          </a:prstGeom>
+          <a:solidFill>
+            <a:srgbClr val="F8FAFC"/>
+          </a:solidFill>
+          <a:ln>
+            <a:noFill/>
+          </a:ln>
+          <a:effectLst/>
+        </p:spPr>
+        <p:style>
+          <a:lnRef idx="1">
+            <a:schemeClr val="accent1"/>
+          </a:lnRef>
+          <a:fillRef idx="3">
+            <a:schemeClr val="accent1"/>
+          </a:fillRef>
+          <a:effectRef idx="2">
+            <a:schemeClr val="accent1"/>
+          </a:effectRef>
+          <a:fontRef idx="minor">
+            <a:schemeClr val="lt1"/>
+          </a:fontRef>
+        </p:style>
+        <p:txBody>
+          <a:bodyPr rtlCol="0" anchor="ctr"/>
+          <a:lstStyle/>
+          <a:p>
+            <a:pPr algn="ctr"/>
+            <a:endParaRPr/>
+          </a:p>
+        </p:txBody>
+      </p:sp>
+      <p:sp>
+        <p:nvSpPr>
+          <p:cNvPr id="3" name="Rounded Rectangle 2"/>
+          <p:cNvSpPr/>
+          <p:nvPr/>
+        </p:nvSpPr>
+        <p:spPr>
+          <a:xfrm>
+            <a:off x="4343400" y="1819275"/>
+            <a:ext cx="3505200" cy="1190625"/>
+          </a:xfrm>
+          <a:prstGeom prst="roundRect">
+            <a:avLst>
+              <a:gd name="adj" fmla="val 9600"/>
+            </a:avLst>
+          </a:prstGeom>
+          <a:solidFill>
+            <a:srgbClr val="F0F9FF"/>
+          </a:solidFill>
+          <a:ln>
+            <a:noFill/>
+          </a:ln>
+          <a:effectLst/>
+        </p:spPr>
+        <p:style>
+          <a:lnRef idx="1">
+            <a:schemeClr val="accent1"/>
+          </a:lnRef>
+          <a:fillRef idx="3">
+            <a:schemeClr val="accent1"/>
+          </a:fillRef>
+          <a:effectRef idx="2">
+            <a:schemeClr val="accent1"/>
+          </a:effectRef>
+          <a:fontRef idx="minor">
+            <a:schemeClr val="lt1"/>
+          </a:fontRef>
+        </p:style>
+        <p:txBody>
+          <a:bodyPr rtlCol="0" anchor="ctr"/>
+          <a:lstStyle/>
+          <a:p>
+            <a:pPr algn="ctr"/>
+            <a:endParaRPr/>
+          </a:p>
+        </p:txBody>
+      </p:sp>
+      <p:sp>
+        <p:nvSpPr>
+          <p:cNvPr id="4" name="Rounded Rectangle 3"/>
+          <p:cNvSpPr/>
+          <p:nvPr/>
+        </p:nvSpPr>
+        <p:spPr>
+          <a:xfrm>
+            <a:off x="8077200" y="1819275"/>
+            <a:ext cx="3505200" cy="1190625"/>
+          </a:xfrm>
+          <a:prstGeom prst="roundRect">
+            <a:avLst>
+              <a:gd name="adj" fmla="val 9600"/>
+            </a:avLst>
+          </a:prstGeom>
+          <a:solidFill>
+            <a:srgbClr val="F0F9FF"/>
+          </a:solidFill>
+          <a:ln>
+            <a:noFill/>
+          </a:ln>
+          <a:effectLst/>
+        </p:spPr>
+        <p:style>
+          <a:lnRef idx="1">
+            <a:schemeClr val="accent1"/>
+          </a:lnRef>
+          <a:fillRef idx="3">
+            <a:schemeClr val="accent1"/>
+          </a:fillRef>
+          <a:effectRef idx="2">
+            <a:schemeClr val="accent1"/>
+          </a:effectRef>
+          <a:fontRef idx="minor">
+            <a:schemeClr val="lt1"/>
+          </a:fontRef>
+        </p:style>
+        <p:txBody>
+          <a:bodyPr rtlCol="0" anchor="ctr"/>
+          <a:lstStyle/>
+          <a:p>
+            <a:pPr algn="ctr"/>
+            <a:endParaRPr/>
+          </a:p>
+        </p:txBody>
+      </p:sp>
+      <p:sp>
+        <p:nvSpPr>
+          <p:cNvPr id="5" name="Rounded Rectangle 4"/>
+          <p:cNvSpPr/>
+          <p:nvPr/>
+        </p:nvSpPr>
+        <p:spPr>
+          <a:xfrm>
+            <a:off x="609600" y="3314700"/>
+            <a:ext cx="10972800" cy="2933700"/>
+          </a:xfrm>
+          <a:prstGeom prst="roundRect">
+            <a:avLst>
+              <a:gd name="adj" fmla="val 5194"/>
+            </a:avLst>
+          </a:prstGeom>
+          <a:solidFill>
+            <a:srgbClr val="F1F5F9"/>
+          </a:solidFill>
+          <a:ln w="28575">
+            <a:solidFill>
+              <a:srgbClr val="CBD5E1"/>
+            </a:solidFill>
+          </a:ln>
+          <a:effectLst/>
+        </p:spPr>
+        <p:style>
+          <a:lnRef idx="1">
+            <a:schemeClr val="accent1"/>
+          </a:lnRef>
+          <a:fillRef idx="3">
+            <a:schemeClr val="accent1"/>
+          </a:fillRef>
+          <a:effectRef idx="2">
+            <a:schemeClr val="accent1"/>
+          </a:effectRef>
+          <a:fontRef idx="minor">
+            <a:schemeClr val="lt1"/>
+          </a:fontRef>
+        </p:style>
+        <p:txBody>
+          <a:bodyPr rtlCol="0" anchor="ctr"/>
+          <a:lstStyle/>
+          <a:p>
+            <a:pPr algn="ctr"/>
+            <a:endParaRPr/>
+          </a:p>
+        </p:txBody>
+      </p:sp>
+      <p:sp>
+        <p:nvSpPr>
+          <p:cNvPr id="6" name="Rectangle 5"/>
+          <p:cNvSpPr/>
+          <p:nvPr/>
+        </p:nvSpPr>
+        <p:spPr>
+          <a:xfrm>
+            <a:off x="609600" y="1819275"/>
+            <a:ext cx="57150" cy="1190625"/>
+          </a:xfrm>
+          <a:prstGeom prst="rect">
+            <a:avLst/>
+          </a:prstGeom>
+          <a:solidFill>
+            <a:srgbClr val="E2E8F0"/>
+          </a:solidFill>
+          <a:ln>
+            <a:noFill/>
+          </a:ln>
+          <a:effectLst/>
+        </p:spPr>
+        <p:style>
+          <a:lnRef idx="1">
+            <a:schemeClr val="accent1"/>
+          </a:lnRef>
+          <a:fillRef idx="3">
+            <a:schemeClr val="accent1"/>
+          </a:fillRef>
+          <a:effectRef idx="2">
+            <a:schemeClr val="accent1"/>
+          </a:effectRef>
+          <a:fontRef idx="minor">
+            <a:schemeClr val="lt1"/>
+          </a:fontRef>
+        </p:style>
+        <p:txBody>
+          <a:bodyPr rtlCol="0" anchor="ctr"/>
+          <a:lstStyle/>
+          <a:p>
+            <a:pPr algn="ctr"/>
+            <a:endParaRPr/>
+          </a:p>
+        </p:txBody>
+      </p:sp>
+      <p:sp>
+        <p:nvSpPr>
+          <p:cNvPr id="7" name="Rectangle 6"/>
+          <p:cNvSpPr/>
+          <p:nvPr/>
+        </p:nvSpPr>
+        <p:spPr>
+          <a:xfrm>
+            <a:off x="4343400" y="1819275"/>
+            <a:ext cx="57150" cy="1190625"/>
+          </a:xfrm>
+          <a:prstGeom prst="rect">
+            <a:avLst/>
+          </a:prstGeom>
+          <a:solidFill>
+            <a:srgbClr val="0284C7"/>
+          </a:solidFill>
+          <a:ln>
+            <a:noFill/>
+          </a:ln>
+          <a:effectLst/>
+        </p:spPr>
+        <p:style>
+          <a:lnRef idx="1">
+            <a:schemeClr val="accent1"/>
+          </a:lnRef>
+          <a:fillRef idx="3">
+            <a:schemeClr val="accent1"/>
+          </a:fillRef>
+          <a:effectRef idx="2">
+            <a:schemeClr val="accent1"/>
+          </a:effectRef>
+          <a:fontRef idx="minor">
+            <a:schemeClr val="lt1"/>
+          </a:fontRef>
+        </p:style>
+        <p:txBody>
+          <a:bodyPr rtlCol="0" anchor="ctr"/>
+          <a:lstStyle/>
+          <a:p>
+            <a:pPr algn="ctr"/>
+            <a:endParaRPr/>
+          </a:p>
+        </p:txBody>
+      </p:sp>
+      <p:sp>
+        <p:nvSpPr>
+          <p:cNvPr id="8" name="Rectangle 7"/>
+          <p:cNvSpPr/>
+          <p:nvPr/>
+        </p:nvSpPr>
+        <p:spPr>
+          <a:xfrm>
+            <a:off x="8077200" y="1819275"/>
+            <a:ext cx="57150" cy="1190625"/>
+          </a:xfrm>
+          <a:prstGeom prst="rect">
+            <a:avLst/>
+          </a:prstGeom>
+          <a:solidFill>
+            <a:srgbClr val="0EA5E9"/>
+          </a:solidFill>
+          <a:ln>
+            <a:noFill/>
+          </a:ln>
+          <a:effectLst/>
+        </p:spPr>
+        <p:style>
+          <a:lnRef idx="1">
+            <a:schemeClr val="accent1"/>
+          </a:lnRef>
+          <a:fillRef idx="3">
+            <a:schemeClr val="accent1"/>
+          </a:fillRef>
+          <a:effectRef idx="2">
+            <a:schemeClr val="accent1"/>
+          </a:effectRef>
+          <a:fontRef idx="minor">
+            <a:schemeClr val="lt1"/>
+          </a:fontRef>
+        </p:style>
+        <p:txBody>
+          <a:bodyPr rtlCol="0" anchor="ctr"/>
+          <a:lstStyle/>
+          <a:p>
+            <a:pPr algn="ctr"/>
+            <a:endParaRPr/>
+          </a:p>
+        </p:txBody>
+      </p:sp>
+      <p:sp>
+        <p:nvSpPr>
+          <p:cNvPr id="9" name="TextBox 8"/>
+          <p:cNvSpPr txBox="1"/>
+          <p:nvPr/>
+        </p:nvSpPr>
+        <p:spPr>
+          <a:xfrm>
+            <a:off x="609600" y="609600"/>
+            <a:ext cx="11582400" cy="466725"/>
+          </a:xfrm>
+          <a:prstGeom prst="rect">
+            <a:avLst/>
+          </a:prstGeom>
+          <a:noFill/>
+        </p:spPr>
+        <p:txBody>
+          <a:bodyPr wrap="none" lIns="0" tIns="0" rIns="0" bIns="0" anchor="t">
+            <a:spAutoFit/>
+          </a:bodyPr>
+          <a:lstStyle/>
+          <a:p>
+            <a:pPr algn="l"/>
+            <a:r>
+              <a:rPr sz="3000" b="1" i="0" u="none">
+                <a:solidFill>
+                  <a:srgbClr val="0F172A"/>
+                </a:solidFill>
+                <a:latin typeface="Inter"/>
+              </a:rPr>
+              <a:t>Space Invaders: aprendizado visual</a:t>
+            </a:r>
+          </a:p>
+        </p:txBody>
+      </p:sp>
+      <p:sp>
+        <p:nvSpPr>
+          <p:cNvPr id="10" name="TextBox 9"/>
+          <p:cNvSpPr txBox="1"/>
+          <p:nvPr/>
+        </p:nvSpPr>
+        <p:spPr>
+          <a:xfrm>
+            <a:off x="609600" y="1190625"/>
+            <a:ext cx="11582400" cy="247650"/>
+          </a:xfrm>
+          <a:prstGeom prst="rect">
+            <a:avLst/>
+          </a:prstGeom>
+          <a:noFill/>
+        </p:spPr>
+        <p:txBody>
+          <a:bodyPr wrap="none" lIns="0" tIns="0" rIns="0" bIns="0" anchor="t">
+            <a:spAutoFit/>
+          </a:bodyPr>
+          <a:lstStyle/>
+          <a:p>
+            <a:pPr algn="l"/>
+            <a:r>
+              <a:rPr sz="1650" b="0" i="0" u="none">
+                <a:solidFill>
+                  <a:srgbClr val="64748B"/>
+                </a:solidFill>
+                <a:latin typeface="Inter"/>
+              </a:rPr>
+              <a:t>Ambos os agentes superaram a referência aleatória, sem avanço monotônico.</a:t>
+            </a:r>
+          </a:p>
+        </p:txBody>
+      </p:sp>
+      <p:sp>
+        <p:nvSpPr>
+          <p:cNvPr id="11" name="TextBox 10"/>
+          <p:cNvSpPr txBox="1"/>
+          <p:nvPr/>
+        </p:nvSpPr>
+        <p:spPr>
+          <a:xfrm>
+            <a:off x="895350" y="2047875"/>
+            <a:ext cx="3738562" cy="457200"/>
+          </a:xfrm>
+          <a:prstGeom prst="rect">
+            <a:avLst/>
+          </a:prstGeom>
+          <a:noFill/>
+        </p:spPr>
+        <p:txBody>
+          <a:bodyPr wrap="none" lIns="0" tIns="0" rIns="0" bIns="0" anchor="t">
+            <a:spAutoFit/>
+          </a:bodyPr>
+          <a:lstStyle/>
+          <a:p>
+            <a:pPr algn="l">
+              <a:lnSpc>
+                <a:spcPts val="3600"/>
+              </a:lnSpc>
+            </a:pPr>
+            <a:r>
+              <a:rPr sz="3600" b="1" i="0" u="none">
+                <a:solidFill>
+                  <a:srgbClr val="64748B"/>
+                </a:solidFill>
+                <a:latin typeface="Inter"/>
+              </a:rPr>
+              <a:t>151,50</a:t>
+            </a:r>
+          </a:p>
+        </p:txBody>
+      </p:sp>
+      <p:sp>
+        <p:nvSpPr>
+          <p:cNvPr id="12" name="TextBox 11"/>
+          <p:cNvSpPr txBox="1"/>
+          <p:nvPr/>
+        </p:nvSpPr>
+        <p:spPr>
+          <a:xfrm>
+            <a:off x="895350" y="2581275"/>
+            <a:ext cx="3738562" cy="200025"/>
+          </a:xfrm>
+          <a:prstGeom prst="rect">
+            <a:avLst/>
+          </a:prstGeom>
+          <a:noFill/>
+        </p:spPr>
+        <p:txBody>
+          <a:bodyPr wrap="none" lIns="0" tIns="0" rIns="0" bIns="0" anchor="t">
+            <a:spAutoFit/>
+          </a:bodyPr>
+          <a:lstStyle/>
+          <a:p>
+            <a:pPr algn="l"/>
+            <a:r>
+              <a:rPr sz="1350" b="1" i="0" u="none">
+                <a:solidFill>
+                  <a:srgbClr val="64748B"/>
+                </a:solidFill>
+                <a:latin typeface="Inter"/>
+              </a:rPr>
+              <a:t>AGENTE ALEATÓRIO</a:t>
+            </a:r>
+          </a:p>
+        </p:txBody>
+      </p:sp>
+      <p:sp>
+        <p:nvSpPr>
+          <p:cNvPr id="13" name="TextBox 12"/>
+          <p:cNvSpPr txBox="1"/>
+          <p:nvPr/>
+        </p:nvSpPr>
+        <p:spPr>
+          <a:xfrm>
+            <a:off x="4629150" y="2047875"/>
+            <a:ext cx="3738562" cy="457200"/>
+          </a:xfrm>
+          <a:prstGeom prst="rect">
+            <a:avLst/>
+          </a:prstGeom>
+          <a:noFill/>
+        </p:spPr>
+        <p:txBody>
+          <a:bodyPr wrap="none" lIns="0" tIns="0" rIns="0" bIns="0" anchor="t">
+            <a:spAutoFit/>
+          </a:bodyPr>
+          <a:lstStyle/>
+          <a:p>
+            <a:pPr algn="l">
+              <a:lnSpc>
+                <a:spcPts val="3600"/>
+              </a:lnSpc>
+            </a:pPr>
+            <a:r>
+              <a:rPr sz="3600" b="1" i="0" u="none">
+                <a:solidFill>
+                  <a:srgbClr val="0F172A"/>
+                </a:solidFill>
+                <a:latin typeface="Inter"/>
+              </a:rPr>
+              <a:t>381,67</a:t>
+            </a:r>
+          </a:p>
+        </p:txBody>
+      </p:sp>
+      <p:sp>
+        <p:nvSpPr>
+          <p:cNvPr id="14" name="TextBox 13"/>
+          <p:cNvSpPr txBox="1"/>
+          <p:nvPr/>
+        </p:nvSpPr>
+        <p:spPr>
+          <a:xfrm>
+            <a:off x="4629150" y="2581275"/>
+            <a:ext cx="3738562" cy="200025"/>
+          </a:xfrm>
+          <a:prstGeom prst="rect">
+            <a:avLst/>
+          </a:prstGeom>
+          <a:noFill/>
+        </p:spPr>
+        <p:txBody>
+          <a:bodyPr wrap="none" lIns="0" tIns="0" rIns="0" bIns="0" anchor="t">
+            <a:spAutoFit/>
+          </a:bodyPr>
+          <a:lstStyle/>
+          <a:p>
+            <a:pPr algn="l"/>
+            <a:r>
+              <a:rPr sz="1350" b="1" i="0" u="none">
+                <a:solidFill>
+                  <a:srgbClr val="64748B"/>
+                </a:solidFill>
+                <a:latin typeface="Inter"/>
+              </a:rPr>
+              <a:t>MÉDIA DQN</a:t>
+            </a:r>
+          </a:p>
+        </p:txBody>
+      </p:sp>
+      <p:sp>
+        <p:nvSpPr>
+          <p:cNvPr id="15" name="TextBox 14"/>
+          <p:cNvSpPr txBox="1"/>
+          <p:nvPr/>
+        </p:nvSpPr>
+        <p:spPr>
+          <a:xfrm>
+            <a:off x="8362950" y="2047875"/>
+            <a:ext cx="3738562" cy="457200"/>
+          </a:xfrm>
+          <a:prstGeom prst="rect">
+            <a:avLst/>
+          </a:prstGeom>
+          <a:noFill/>
+        </p:spPr>
+        <p:txBody>
+          <a:bodyPr wrap="none" lIns="0" tIns="0" rIns="0" bIns="0" anchor="t">
+            <a:spAutoFit/>
+          </a:bodyPr>
+          <a:lstStyle/>
+          <a:p>
+            <a:pPr algn="l">
+              <a:lnSpc>
+                <a:spcPts val="3600"/>
+              </a:lnSpc>
+            </a:pPr>
+            <a:r>
+              <a:rPr sz="3600" b="1" i="0" u="none">
+                <a:solidFill>
+                  <a:srgbClr val="0F172A"/>
+                </a:solidFill>
+                <a:latin typeface="Inter"/>
+              </a:rPr>
+              <a:t>444,17</a:t>
+            </a:r>
+          </a:p>
+        </p:txBody>
+      </p:sp>
+      <p:sp>
+        <p:nvSpPr>
+          <p:cNvPr id="16" name="TextBox 15"/>
+          <p:cNvSpPr txBox="1"/>
+          <p:nvPr/>
+        </p:nvSpPr>
+        <p:spPr>
+          <a:xfrm>
+            <a:off x="8362950" y="2581275"/>
+            <a:ext cx="3738562" cy="200025"/>
+          </a:xfrm>
+          <a:prstGeom prst="rect">
+            <a:avLst/>
+          </a:prstGeom>
+          <a:noFill/>
+        </p:spPr>
+        <p:txBody>
+          <a:bodyPr wrap="none" lIns="0" tIns="0" rIns="0" bIns="0" anchor="t">
+            <a:spAutoFit/>
+          </a:bodyPr>
+          <a:lstStyle/>
+          <a:p>
+            <a:pPr algn="l"/>
+            <a:r>
+              <a:rPr sz="1350" b="1" i="0" u="none">
+                <a:solidFill>
+                  <a:srgbClr val="64748B"/>
+                </a:solidFill>
+                <a:latin typeface="Inter"/>
+              </a:rPr>
+              <a:t>MÉDIA DDQN</a:t>
+            </a:r>
+          </a:p>
+        </p:txBody>
+      </p:sp>
+      <p:pic>
+        <p:nvPicPr>
+          <p:cNvPr id="20" name="Imagem 19">
+            <a:extLst>
+              <a:ext uri="{FF2B5EF4-FFF2-40B4-BE49-F238E27FC236}">
+                <a16:creationId xmlns:a16="http://schemas.microsoft.com/office/drawing/2014/main" id="{1FD3FB26-EA3C-4F3F-AD69-B4874F544246}"/>
+              </a:ext>
+            </a:extLst>
+          </p:cNvPr>
+          <p:cNvPicPr>
+            <a:picLocks noChangeAspect="1"/>
+          </p:cNvPicPr>
+          <p:nvPr/>
+        </p:nvPicPr>
+        <p:blipFill>
+          <a:blip r:embed="rId2"/>
+          <a:stretch>
+            <a:fillRect/>
+          </a:stretch>
+        </p:blipFill>
+        <p:spPr>
+          <a:xfrm>
+            <a:off x="6254781" y="3543300"/>
+            <a:ext cx="5152635" cy="2339265"/>
+          </a:xfrm>
+          <a:prstGeom prst="rect">
+            <a:avLst/>
+          </a:prstGeom>
+        </p:spPr>
+      </p:pic>
+      <p:pic>
+        <p:nvPicPr>
+          <p:cNvPr id="22" name="Imagem 21">
+            <a:extLst>
+              <a:ext uri="{FF2B5EF4-FFF2-40B4-BE49-F238E27FC236}">
+                <a16:creationId xmlns:a16="http://schemas.microsoft.com/office/drawing/2014/main" id="{E37304FF-C1B9-F637-7DD9-5489443D1A68}"/>
+              </a:ext>
+            </a:extLst>
+          </p:cNvPr>
+          <p:cNvPicPr>
+            <a:picLocks noChangeAspect="1"/>
+          </p:cNvPicPr>
+          <p:nvPr/>
+        </p:nvPicPr>
+        <p:blipFill>
+          <a:blip r:embed="rId3"/>
+          <a:stretch>
+            <a:fillRect/>
+          </a:stretch>
+        </p:blipFill>
+        <p:spPr>
+          <a:xfrm>
+            <a:off x="935264" y="3543301"/>
+            <a:ext cx="5152635" cy="2339265"/>
+          </a:xfrm>
+          <a:prstGeom prst="rect">
+            <a:avLst/>
+          </a:prstGeom>
+        </p:spPr>
+      </p:pic>
+    </p:spTree>
+  </p:cSld>
+  <p:clrMapOvr>
+    <a:masterClrMapping/>
+  </p:clrMapOvr>
+</p:sld>
+</file>
+
 <file path=ppt/slides/slide12.xml><?xml version="1.0" encoding="utf-8"?>
 <p:sld xmlns:a="http://schemas.openxmlformats.org/drawingml/2006/main" xmlns:r="http://schemas.openxmlformats.org/officeDocument/2006/relationships" xmlns:p="http://schemas.openxmlformats.org/presentationml/2006/main">
   <p:cSld>
@@ -13383,4 +13431,10 @@
   </a:objectDefaults>
   <a:extraClrSchemeLst/>
 </a:theme>
+</file>
+
+<file path=docMetadata/LabelInfo.xml><?xml version="1.0" encoding="utf-8"?>
+<clbl:labelList xmlns:clbl="http://schemas.microsoft.com/office/2020/mipLabelMetadata">
+  <clbl:label id="{019c027e-33b7-45fc-a572-8ffa5d09ec36}" enabled="1" method="Standard" siteId="{031a09bc-a2bf-44df-888e-4e09355b7a24}" contentBits="2" removed="0"/>
+</clbl:labelList>
 </file>